--- a/courses/learn_placement/module02-03-quadratic-place/slides.pptx
+++ b/courses/learn_placement/module02-03-quadratic-place/slides.pptx
@@ -16,6 +16,9 @@
     <p:sldId id="264" r:id="rId16"/>
     <p:sldId id="265" r:id="rId17"/>
     <p:sldId id="266" r:id="rId18"/>
+    <p:sldId id="267" r:id="rId19"/>
+    <p:sldId id="268" r:id="rId20"/>
+    <p:sldId id="269" r:id="rId21"/>
   </p:sldIdLst>
   <p:sldSz cx="12191695" cy="6858000" type="screen4x3"/>
   <p:notesSz cx="6858000" cy="9144000"/>
@@ -582,7 +585,7 @@
           <a:lstStyle/>
           <a:p>
             <a:r>
-              <a:t>Common traps: celebrating HPWL while cells pile into one bin; ignoring fixed pads A and D; mixing bbox and clique models in one report; keeping only the final SA iterate instead of the best; and forgetting that timing weights change the objective, not just the label.</a:t>
+              <a:t>In the browser lab track, open the **quadratic-place** lab from the tools shelf. Load the starter placement, run the algorithm once, and read HPWL—and density when the panel shows it. Work the challenges that lock the goldens, then come back to implement the same loop yourself.</a:t>
             </a:r>
           </a:p>
         </p:txBody>
@@ -652,6 +655,146 @@
           <a:lstStyle/>
           <a:p>
             <a:r>
+              <a:t>In the implement track, open this module's EXAMPLES.md Pseudocode section and the course common solvers. Parse `tiny_place.json`, run the algorithm with a deterministic seed, and print coordinates plus HPWL. Match the browser goldens before you claim the checklist.</a:t>
+            </a:r>
+          </a:p>
+        </p:txBody>
+      </p:sp>
+      <p:sp>
+        <p:nvSpPr>
+          <p:cNvPr id="4" name="Slide Number Placeholder 3"/>
+          <p:cNvSpPr>
+            <a:spLocks noGrp="1"/>
+          </p:cNvSpPr>
+          <p:nvPr>
+            <p:ph type="sldNum" idx="5" sz="quarter"/>
+          </p:nvPr>
+        </p:nvSpPr>
+        <p:spPr/>
+      </p:sp>
+    </p:spTree>
+  </p:cSld>
+  <p:clrMapOvr>
+    <a:masterClrMapping/>
+  </p:clrMapOvr>
+</p:notes>
+</file>
+
+<file path=ppt/notesSlides/notesSlide12.xml><?xml version="1.0" encoding="utf-8"?>
+<p:notes xmlns:a="http://schemas.openxmlformats.org/drawingml/2006/main" xmlns:p="http://schemas.openxmlformats.org/presentationml/2006/main" xmlns:r="http://schemas.openxmlformats.org/officeDocument/2006/relationships">
+  <p:cSld>
+    <p:spTree>
+      <p:nvGrpSpPr>
+        <p:cNvPr id="1" name=""/>
+        <p:cNvGrpSpPr/>
+        <p:nvPr/>
+      </p:nvGrpSpPr>
+      <p:grpSpPr>
+        <a:xfrm>
+          <a:off x="0" y="0"/>
+          <a:ext cx="0" cy="0"/>
+          <a:chOff x="0" y="0"/>
+          <a:chExt cx="0" cy="0"/>
+        </a:xfrm>
+      </p:grpSpPr>
+      <p:sp>
+        <p:nvSpPr>
+          <p:cNvPr id="2" name="Slide Image Placeholder 1"/>
+          <p:cNvSpPr>
+            <a:spLocks noGrp="1"/>
+          </p:cNvSpPr>
+          <p:nvPr>
+            <p:ph type="sldImg" idx="2"/>
+          </p:nvPr>
+        </p:nvSpPr>
+        <p:spPr/>
+      </p:sp>
+      <p:sp>
+        <p:nvSpPr>
+          <p:cNvPr id="3" name="Notes Placeholder 2"/>
+          <p:cNvSpPr>
+            <a:spLocks noGrp="1"/>
+          </p:cNvSpPr>
+          <p:nvPr>
+            <p:ph type="body" idx="3" sz="quarter"/>
+          </p:nvPr>
+        </p:nvSpPr>
+        <p:spPr/>
+        <p:txBody>
+          <a:bodyPr/>
+          <a:lstStyle/>
+          <a:p>
+            <a:r>
+              <a:t>Common traps: celebrating HPWL while cells pile into one bin; ignoring fixed pads A and D; mixing bbox and clique models in one report; keeping only the final SA iterate instead of the best; and forgetting that timing weights change the objective, not just the label.</a:t>
+            </a:r>
+          </a:p>
+        </p:txBody>
+      </p:sp>
+      <p:sp>
+        <p:nvSpPr>
+          <p:cNvPr id="4" name="Slide Number Placeholder 3"/>
+          <p:cNvSpPr>
+            <a:spLocks noGrp="1"/>
+          </p:cNvSpPr>
+          <p:nvPr>
+            <p:ph type="sldNum" idx="5" sz="quarter"/>
+          </p:nvPr>
+        </p:nvSpPr>
+        <p:spPr/>
+      </p:sp>
+    </p:spTree>
+  </p:cSld>
+  <p:clrMapOvr>
+    <a:masterClrMapping/>
+  </p:clrMapOvr>
+</p:notes>
+</file>
+
+<file path=ppt/notesSlides/notesSlide13.xml><?xml version="1.0" encoding="utf-8"?>
+<p:notes xmlns:a="http://schemas.openxmlformats.org/drawingml/2006/main" xmlns:p="http://schemas.openxmlformats.org/presentationml/2006/main" xmlns:r="http://schemas.openxmlformats.org/officeDocument/2006/relationships">
+  <p:cSld>
+    <p:spTree>
+      <p:nvGrpSpPr>
+        <p:cNvPr id="1" name=""/>
+        <p:cNvGrpSpPr/>
+        <p:nvPr/>
+      </p:nvGrpSpPr>
+      <p:grpSpPr>
+        <a:xfrm>
+          <a:off x="0" y="0"/>
+          <a:ext cx="0" cy="0"/>
+          <a:chOff x="0" y="0"/>
+          <a:chExt cx="0" cy="0"/>
+        </a:xfrm>
+      </p:grpSpPr>
+      <p:sp>
+        <p:nvSpPr>
+          <p:cNvPr id="2" name="Slide Image Placeholder 1"/>
+          <p:cNvSpPr>
+            <a:spLocks noGrp="1"/>
+          </p:cNvSpPr>
+          <p:nvPr>
+            <p:ph type="sldImg" idx="2"/>
+          </p:nvPr>
+        </p:nvSpPr>
+        <p:spPr/>
+      </p:sp>
+      <p:sp>
+        <p:nvSpPr>
+          <p:cNvPr id="3" name="Notes Placeholder 2"/>
+          <p:cNvSpPr>
+            <a:spLocks noGrp="1"/>
+          </p:cNvSpPr>
+          <p:nvPr>
+            <p:ph type="body" idx="3" sz="quarter"/>
+          </p:nvPr>
+        </p:nvSpPr>
+        <p:spPr/>
+        <p:txBody>
+          <a:bodyPr/>
+          <a:lstStyle/>
+          <a:p>
+            <a:r>
               <a:t>Complete the checklist for at least one track—preferably both. Implement until your metrics match the starter goldens. When you’re ready, take the short quiz, then continue to the next module.</a:t>
             </a:r>
           </a:p>
@@ -725,12 +868,6 @@
               <a:t>Gauss–Seidel style: replace each free cell with a blend of neighbor average and prior coordinate so the solve does not collapse. Fixed pads anchor the system. Teaching point: pad constraints raise HPWL versus unconstrained force on the same seed.</a:t>
             </a:r>
           </a:p>
-          <a:p/>
-          <a:p>
-            <a:r>
-              <a:t>&lt;!-- algorithm-walkthrough --&gt;</a:t>
-            </a:r>
-          </a:p>
         </p:txBody>
       </p:sp>
       <p:sp>
@@ -798,7 +935,13 @@
           <a:lstStyle/>
           <a:p>
             <a:r>
-              <a:t>Quadratic-lite averages neighbors under fixed pads. Here A stays at (0,0) and D at (8,8)—anchors that free cells must respect.</a:t>
+              <a:t>Quadratic-lite solves free cells toward neighbor averages under pinned pads. Damping keeps the system from collapsing.</a:t>
+            </a:r>
+          </a:p>
+          <a:p/>
+          <a:p>
+            <a:r>
+              <a:t>Open this module's examples file and find the Pseudocode section. That written sketch is what you implement on the implement track and what the browser challenges measure.</a:t>
             </a:r>
           </a:p>
         </p:txBody>
@@ -868,7 +1011,7 @@
           <a:lstStyle/>
           <a:p>
             <a:r>
-              <a:t>B, C, E, and F update toward the average of their neighbors while A and D hold. The system cannot collapse onto the pads.</a:t>
+              <a:t>With A and D fixed, the teaching solve reaches HPWL forty-eight from fifty-two—modest win, honest about pad constraints.</a:t>
             </a:r>
           </a:p>
         </p:txBody>
@@ -938,7 +1081,7 @@
           <a:lstStyle/>
           <a:p>
             <a:r>
-              <a:t>Default iterations reach total HPWL forty-eight. Pads constrain the free cells, so you will not match free force’s eighteen point seven.</a:t>
+              <a:t>Quadratic-lite averages neighbors under fixed pads. Here A stays at (0,0) and D at (8,8)—anchors that free cells must respect.</a:t>
             </a:r>
           </a:p>
         </p:txBody>
@@ -1008,7 +1151,7 @@
           <a:lstStyle/>
           <a:p>
             <a:r>
-              <a:t>Force without pads reaches about eighteen point seven; quadratic with pads stays at forty-eight. Same seed, different constraint story.</a:t>
+              <a:t>B, C, E, and F update toward the average of their neighbors while A and D hold. The system cannot collapse onto the pads.</a:t>
             </a:r>
           </a:p>
         </p:txBody>
@@ -1078,13 +1221,7 @@
           <a:lstStyle/>
           <a:p>
             <a:r>
-              <a:t>Always declare fixed cells. On this instance the quadratic golden is forty-eight—modest wirelength win, honest about pad constraints.</a:t>
-            </a:r>
-          </a:p>
-          <a:p/>
-          <a:p>
-            <a:r>
-              <a:t>&lt;!-- /algorithm-walkthrough --&gt;</a:t>
+              <a:t>Default iterations reach total HPWL forty-eight. Pads constrain the free cells, so you will not match free force’s eighteen point seven.</a:t>
             </a:r>
           </a:p>
         </p:txBody>
@@ -1154,7 +1291,7 @@
           <a:lstStyle/>
           <a:p>
             <a:r>
-              <a:t>In the browser lab track, open the **quadratic-place** lab from the tools shelf. Load the starter placement, run the algorithm once, and read HPWL—and density when the panel shows it. Work the challenges that lock the goldens, then come back to implement the same loop yourself.</a:t>
+              <a:t>Force without pads reaches about eighteen point seven; quadratic with pads stays at forty-eight. Same seed, different constraint story.</a:t>
             </a:r>
           </a:p>
         </p:txBody>
@@ -1224,7 +1361,7 @@
           <a:lstStyle/>
           <a:p>
             <a:r>
-              <a:t>In the implement track, open this module’s examples and the course `common/` solvers. Parse `tiny_place.json`, run the algorithm with a deterministic seed, and print coordinates plus HPWL. Match the browser goldens before you claim the checklist.</a:t>
+              <a:t>Always declare fixed cells. On this instance the quadratic golden is forty-eight—modest wirelength win, honest about pad constraints.</a:t>
             </a:r>
           </a:p>
         </p:txBody>
@@ -4382,21 +4519,45 @@
                 </a:solidFill>
                 <a:latin typeface="Calibri"/>
               </a:rPr>
-              <a:t>Pitfalls</a:t>
-            </a:r>
-          </a:p>
-        </p:txBody>
-      </p:sp>
-      <p:sp>
-        <p:nvSpPr>
-          <p:cNvPr id="3" name="TextBox 2"/>
+              <a:t>Pads anchor the solve</a:t>
+            </a:r>
+          </a:p>
+        </p:txBody>
+      </p:sp>
+      <p:pic>
+        <p:nvPicPr>
+          <p:cNvPr id="3" name="Picture 2" descr="05-takeaway.png"/>
+          <p:cNvPicPr>
+            <a:picLocks noChangeAspect="1"/>
+          </p:cNvPicPr>
+          <p:nvPr/>
+        </p:nvPicPr>
+        <p:blipFill>
+          <a:blip r:embed="rId2"/>
+          <a:stretch>
+            <a:fillRect/>
+          </a:stretch>
+        </p:blipFill>
+        <p:spPr>
+          <a:xfrm>
+            <a:off x="548640" y="1143000"/>
+            <a:ext cx="9404113" cy="4572000"/>
+          </a:xfrm>
+          <a:prstGeom prst="rect">
+            <a:avLst/>
+          </a:prstGeom>
+        </p:spPr>
+      </p:pic>
+      <p:sp>
+        <p:nvSpPr>
+          <p:cNvPr id="4" name="TextBox 3"/>
           <p:cNvSpPr txBox="1"/>
           <p:nvPr/>
         </p:nvSpPr>
         <p:spPr>
           <a:xfrm>
-            <a:off x="548640" y="1234440"/>
-            <a:ext cx="11064240" cy="4937760"/>
+            <a:off x="548640" y="5897880"/>
+            <a:ext cx="11064240" cy="411480"/>
           </a:xfrm>
           <a:prstGeom prst="rect">
             <a:avLst/>
@@ -4409,32 +4570,26 @@
           </a:bodyPr>
           <a:lstStyle/>
           <a:p>
-            <a:pPr lvl="0" marL="457200" indent="-228600">
-              <a:buFont typeface="Calibri"/>
-              <a:spcAft>
-                <a:spcPts val="1000"/>
-              </a:spcAft>
-              <a:buSzPct val="100000"/>
-              <a:buChar char="•"/>
+            <a:pPr>
               <a:lnSpc>
                 <a:spcPts val="2200"/>
               </a:lnSpc>
             </a:pPr>
             <a:r>
-              <a:rPr sz="2000" b="0">
+              <a:rPr sz="1200" b="0">
                 <a:solidFill>
                   <a:srgbClr val="333333"/>
                 </a:solidFill>
                 <a:latin typeface="Calibri"/>
               </a:rPr>
-              <a:t>Common traps</a:t>
-            </a:r>
-          </a:p>
-        </p:txBody>
-      </p:sp>
-      <p:sp>
-        <p:nvSpPr>
-          <p:cNvPr id="4" name="TextBox 3"/>
+              <a:t>Pads anchor the solve</a:t>
+            </a:r>
+          </a:p>
+        </p:txBody>
+      </p:sp>
+      <p:sp>
+        <p:nvSpPr>
+          <p:cNvPr id="5" name="TextBox 4"/>
           <p:cNvSpPr txBox="1"/>
           <p:nvPr/>
         </p:nvSpPr>
@@ -4523,6 +4678,535 @@
                 </a:solidFill>
                 <a:latin typeface="Calibri"/>
               </a:rPr>
+              <a:t>Browser lab track</a:t>
+            </a:r>
+          </a:p>
+        </p:txBody>
+      </p:sp>
+      <p:sp>
+        <p:nvSpPr>
+          <p:cNvPr id="3" name="TextBox 2"/>
+          <p:cNvSpPr txBox="1"/>
+          <p:nvPr/>
+        </p:nvSpPr>
+        <p:spPr>
+          <a:xfrm>
+            <a:off x="548640" y="1234440"/>
+            <a:ext cx="11064240" cy="4937760"/>
+          </a:xfrm>
+          <a:prstGeom prst="rect">
+            <a:avLst/>
+          </a:prstGeom>
+          <a:noFill/>
+        </p:spPr>
+        <p:txBody>
+          <a:bodyPr wrap="square">
+            <a:noAutofit/>
+          </a:bodyPr>
+          <a:lstStyle/>
+          <a:p>
+            <a:pPr lvl="0" marL="457200" indent="-228600">
+              <a:buFont typeface="Calibri"/>
+              <a:spcAft>
+                <a:spcPts val="1000"/>
+              </a:spcAft>
+              <a:buSzPct val="100000"/>
+              <a:buChar char="•"/>
+              <a:lnSpc>
+                <a:spcPts val="2200"/>
+              </a:lnSpc>
+            </a:pPr>
+            <a:r>
+              <a:rPr sz="2000" b="0">
+                <a:solidFill>
+                  <a:srgbClr val="333333"/>
+                </a:solidFill>
+                <a:latin typeface="Calibri"/>
+              </a:rPr>
+              <a:t>In the browser lab track, open the </a:t>
+            </a:r>
+            <a:r>
+              <a:rPr sz="2000" b="1">
+                <a:solidFill>
+                  <a:srgbClr val="333333"/>
+                </a:solidFill>
+                <a:latin typeface="Calibri"/>
+              </a:rPr>
+              <a:t>quadratic-place</a:t>
+            </a:r>
+            <a:r>
+              <a:rPr sz="2000" b="0">
+                <a:solidFill>
+                  <a:srgbClr val="333333"/>
+                </a:solidFill>
+                <a:latin typeface="Calibri"/>
+              </a:rPr>
+              <a:t> lab from the tools shelf</a:t>
+            </a:r>
+          </a:p>
+          <a:p>
+            <a:pPr lvl="0" marL="457200" indent="-228600">
+              <a:buFont typeface="Calibri"/>
+              <a:spcAft>
+                <a:spcPts val="1000"/>
+              </a:spcAft>
+              <a:buSzPct val="100000"/>
+              <a:buChar char="•"/>
+              <a:lnSpc>
+                <a:spcPts val="2200"/>
+              </a:lnSpc>
+            </a:pPr>
+            <a:r>
+              <a:rPr sz="2000" b="0">
+                <a:solidFill>
+                  <a:srgbClr val="333333"/>
+                </a:solidFill>
+                <a:latin typeface="Calibri"/>
+              </a:rPr>
+              <a:t>Load the starter placement, run the algorithm once</a:t>
+            </a:r>
+          </a:p>
+          <a:p>
+            <a:pPr lvl="0" marL="457200" indent="-228600">
+              <a:buFont typeface="Calibri"/>
+              <a:spcAft>
+                <a:spcPts val="1000"/>
+              </a:spcAft>
+              <a:buSzPct val="100000"/>
+              <a:buChar char="•"/>
+              <a:lnSpc>
+                <a:spcPts val="2200"/>
+              </a:lnSpc>
+            </a:pPr>
+            <a:r>
+              <a:rPr sz="2000" b="0">
+                <a:solidFill>
+                  <a:srgbClr val="333333"/>
+                </a:solidFill>
+                <a:latin typeface="Calibri"/>
+              </a:rPr>
+              <a:t>Work the challenges that lock the goldens</a:t>
+            </a:r>
+          </a:p>
+        </p:txBody>
+      </p:sp>
+      <p:sp>
+        <p:nvSpPr>
+          <p:cNvPr id="4" name="TextBox 3"/>
+          <p:cNvSpPr txBox="1"/>
+          <p:nvPr/>
+        </p:nvSpPr>
+        <p:spPr>
+          <a:xfrm>
+            <a:off x="548640" y="6355080"/>
+            <a:ext cx="11064240" cy="320040"/>
+          </a:xfrm>
+          <a:prstGeom prst="rect">
+            <a:avLst/>
+          </a:prstGeom>
+          <a:noFill/>
+        </p:spPr>
+        <p:txBody>
+          <a:bodyPr wrap="square">
+            <a:noAutofit/>
+          </a:bodyPr>
+          <a:lstStyle/>
+          <a:p>
+            <a:pPr algn="r">
+              <a:lnSpc>
+                <a:spcPts val="2200"/>
+              </a:lnSpc>
+              <a:defRPr sz="1000" b="0">
+                <a:solidFill>
+                  <a:srgbClr val="666666"/>
+                </a:solidFill>
+                <a:latin typeface="Calibri"/>
+              </a:defRPr>
+            </a:pPr>
+            <a:r>
+              <a:t>learn_placement — 03 quadratic place</a:t>
+            </a:r>
+          </a:p>
+        </p:txBody>
+      </p:sp>
+    </p:spTree>
+  </p:cSld>
+  <p:clrMapOvr>
+    <a:masterClrMapping/>
+  </p:clrMapOvr>
+</p:sld>
+</file>
+
+<file path=ppt/slides/slide12.xml><?xml version="1.0" encoding="utf-8"?>
+<p:sld xmlns:a="http://schemas.openxmlformats.org/drawingml/2006/main" xmlns:p="http://schemas.openxmlformats.org/presentationml/2006/main" xmlns:r="http://schemas.openxmlformats.org/officeDocument/2006/relationships">
+  <p:cSld>
+    <p:spTree>
+      <p:nvGrpSpPr>
+        <p:cNvPr id="1" name=""/>
+        <p:cNvGrpSpPr/>
+        <p:nvPr/>
+      </p:nvGrpSpPr>
+      <p:grpSpPr/>
+      <p:sp>
+        <p:nvSpPr>
+          <p:cNvPr id="2" name="TextBox 1"/>
+          <p:cNvSpPr txBox="1"/>
+          <p:nvPr/>
+        </p:nvSpPr>
+        <p:spPr>
+          <a:xfrm>
+            <a:off x="548640" y="411480"/>
+            <a:ext cx="11064240" cy="777240"/>
+          </a:xfrm>
+          <a:prstGeom prst="rect">
+            <a:avLst/>
+          </a:prstGeom>
+          <a:noFill/>
+        </p:spPr>
+        <p:txBody>
+          <a:bodyPr wrap="square">
+            <a:noAutofit/>
+          </a:bodyPr>
+          <a:lstStyle/>
+          <a:p>
+            <a:pPr>
+              <a:lnSpc>
+                <a:spcPts val="2200"/>
+              </a:lnSpc>
+            </a:pPr>
+            <a:r>
+              <a:rPr sz="2800" b="1">
+                <a:solidFill>
+                  <a:srgbClr val="1A1A2E"/>
+                </a:solidFill>
+                <a:latin typeface="Calibri"/>
+              </a:rPr>
+              <a:t>Implement track</a:t>
+            </a:r>
+          </a:p>
+        </p:txBody>
+      </p:sp>
+      <p:sp>
+        <p:nvSpPr>
+          <p:cNvPr id="3" name="TextBox 2"/>
+          <p:cNvSpPr txBox="1"/>
+          <p:nvPr/>
+        </p:nvSpPr>
+        <p:spPr>
+          <a:xfrm>
+            <a:off x="548640" y="1234440"/>
+            <a:ext cx="11064240" cy="4937760"/>
+          </a:xfrm>
+          <a:prstGeom prst="rect">
+            <a:avLst/>
+          </a:prstGeom>
+          <a:noFill/>
+        </p:spPr>
+        <p:txBody>
+          <a:bodyPr wrap="square">
+            <a:noAutofit/>
+          </a:bodyPr>
+          <a:lstStyle/>
+          <a:p>
+            <a:pPr lvl="0" marL="457200" indent="-228600">
+              <a:buFont typeface="Calibri"/>
+              <a:spcAft>
+                <a:spcPts val="1000"/>
+              </a:spcAft>
+              <a:buSzPct val="100000"/>
+              <a:buChar char="•"/>
+              <a:lnSpc>
+                <a:spcPts val="2200"/>
+              </a:lnSpc>
+            </a:pPr>
+            <a:r>
+              <a:rPr sz="2000" b="0">
+                <a:solidFill>
+                  <a:srgbClr val="333333"/>
+                </a:solidFill>
+                <a:latin typeface="Calibri"/>
+              </a:rPr>
+              <a:t>In the implement track</a:t>
+            </a:r>
+          </a:p>
+          <a:p>
+            <a:pPr lvl="0" marL="457200" indent="-228600">
+              <a:buFont typeface="Calibri"/>
+              <a:spcAft>
+                <a:spcPts val="1000"/>
+              </a:spcAft>
+              <a:buSzPct val="100000"/>
+              <a:buChar char="•"/>
+              <a:lnSpc>
+                <a:spcPts val="2200"/>
+              </a:lnSpc>
+            </a:pPr>
+            <a:r>
+              <a:rPr sz="2000" b="0">
+                <a:solidFill>
+                  <a:srgbClr val="333333"/>
+                </a:solidFill>
+                <a:latin typeface="Calibri"/>
+              </a:rPr>
+              <a:t>Parse `tiny_place.json`, run the algorithm with a deterministic seed</a:t>
+            </a:r>
+          </a:p>
+          <a:p>
+            <a:pPr lvl="0" marL="457200" indent="-228600">
+              <a:buFont typeface="Calibri"/>
+              <a:spcAft>
+                <a:spcPts val="1000"/>
+              </a:spcAft>
+              <a:buSzPct val="100000"/>
+              <a:buChar char="•"/>
+              <a:lnSpc>
+                <a:spcPts val="2200"/>
+              </a:lnSpc>
+            </a:pPr>
+            <a:r>
+              <a:rPr sz="2000" b="0">
+                <a:solidFill>
+                  <a:srgbClr val="333333"/>
+                </a:solidFill>
+                <a:latin typeface="Calibri"/>
+              </a:rPr>
+              <a:t>Match the browser goldens before you claim the checklist</a:t>
+            </a:r>
+          </a:p>
+        </p:txBody>
+      </p:sp>
+      <p:sp>
+        <p:nvSpPr>
+          <p:cNvPr id="4" name="TextBox 3"/>
+          <p:cNvSpPr txBox="1"/>
+          <p:nvPr/>
+        </p:nvSpPr>
+        <p:spPr>
+          <a:xfrm>
+            <a:off x="548640" y="6355080"/>
+            <a:ext cx="11064240" cy="320040"/>
+          </a:xfrm>
+          <a:prstGeom prst="rect">
+            <a:avLst/>
+          </a:prstGeom>
+          <a:noFill/>
+        </p:spPr>
+        <p:txBody>
+          <a:bodyPr wrap="square">
+            <a:noAutofit/>
+          </a:bodyPr>
+          <a:lstStyle/>
+          <a:p>
+            <a:pPr algn="r">
+              <a:lnSpc>
+                <a:spcPts val="2200"/>
+              </a:lnSpc>
+              <a:defRPr sz="1000" b="0">
+                <a:solidFill>
+                  <a:srgbClr val="666666"/>
+                </a:solidFill>
+                <a:latin typeface="Calibri"/>
+              </a:defRPr>
+            </a:pPr>
+            <a:r>
+              <a:t>learn_placement — 03 quadratic place</a:t>
+            </a:r>
+          </a:p>
+        </p:txBody>
+      </p:sp>
+    </p:spTree>
+  </p:cSld>
+  <p:clrMapOvr>
+    <a:masterClrMapping/>
+  </p:clrMapOvr>
+</p:sld>
+</file>
+
+<file path=ppt/slides/slide13.xml><?xml version="1.0" encoding="utf-8"?>
+<p:sld xmlns:a="http://schemas.openxmlformats.org/drawingml/2006/main" xmlns:p="http://schemas.openxmlformats.org/presentationml/2006/main" xmlns:r="http://schemas.openxmlformats.org/officeDocument/2006/relationships">
+  <p:cSld>
+    <p:spTree>
+      <p:nvGrpSpPr>
+        <p:cNvPr id="1" name=""/>
+        <p:cNvGrpSpPr/>
+        <p:nvPr/>
+      </p:nvGrpSpPr>
+      <p:grpSpPr/>
+      <p:sp>
+        <p:nvSpPr>
+          <p:cNvPr id="2" name="TextBox 1"/>
+          <p:cNvSpPr txBox="1"/>
+          <p:nvPr/>
+        </p:nvSpPr>
+        <p:spPr>
+          <a:xfrm>
+            <a:off x="548640" y="411480"/>
+            <a:ext cx="11064240" cy="777240"/>
+          </a:xfrm>
+          <a:prstGeom prst="rect">
+            <a:avLst/>
+          </a:prstGeom>
+          <a:noFill/>
+        </p:spPr>
+        <p:txBody>
+          <a:bodyPr wrap="square">
+            <a:noAutofit/>
+          </a:bodyPr>
+          <a:lstStyle/>
+          <a:p>
+            <a:pPr>
+              <a:lnSpc>
+                <a:spcPts val="2200"/>
+              </a:lnSpc>
+            </a:pPr>
+            <a:r>
+              <a:rPr sz="2800" b="1">
+                <a:solidFill>
+                  <a:srgbClr val="1A1A2E"/>
+                </a:solidFill>
+                <a:latin typeface="Calibri"/>
+              </a:rPr>
+              <a:t>Pitfalls</a:t>
+            </a:r>
+          </a:p>
+        </p:txBody>
+      </p:sp>
+      <p:sp>
+        <p:nvSpPr>
+          <p:cNvPr id="3" name="TextBox 2"/>
+          <p:cNvSpPr txBox="1"/>
+          <p:nvPr/>
+        </p:nvSpPr>
+        <p:spPr>
+          <a:xfrm>
+            <a:off x="548640" y="1234440"/>
+            <a:ext cx="11064240" cy="4937760"/>
+          </a:xfrm>
+          <a:prstGeom prst="rect">
+            <a:avLst/>
+          </a:prstGeom>
+          <a:noFill/>
+        </p:spPr>
+        <p:txBody>
+          <a:bodyPr wrap="square">
+            <a:noAutofit/>
+          </a:bodyPr>
+          <a:lstStyle/>
+          <a:p>
+            <a:pPr lvl="0" marL="457200" indent="-228600">
+              <a:buFont typeface="Calibri"/>
+              <a:spcAft>
+                <a:spcPts val="1000"/>
+              </a:spcAft>
+              <a:buSzPct val="100000"/>
+              <a:buChar char="•"/>
+              <a:lnSpc>
+                <a:spcPts val="2200"/>
+              </a:lnSpc>
+            </a:pPr>
+            <a:r>
+              <a:rPr sz="2000" b="0">
+                <a:solidFill>
+                  <a:srgbClr val="333333"/>
+                </a:solidFill>
+                <a:latin typeface="Calibri"/>
+              </a:rPr>
+              <a:t>Common traps</a:t>
+            </a:r>
+          </a:p>
+        </p:txBody>
+      </p:sp>
+      <p:sp>
+        <p:nvSpPr>
+          <p:cNvPr id="4" name="TextBox 3"/>
+          <p:cNvSpPr txBox="1"/>
+          <p:nvPr/>
+        </p:nvSpPr>
+        <p:spPr>
+          <a:xfrm>
+            <a:off x="548640" y="6355080"/>
+            <a:ext cx="11064240" cy="320040"/>
+          </a:xfrm>
+          <a:prstGeom prst="rect">
+            <a:avLst/>
+          </a:prstGeom>
+          <a:noFill/>
+        </p:spPr>
+        <p:txBody>
+          <a:bodyPr wrap="square">
+            <a:noAutofit/>
+          </a:bodyPr>
+          <a:lstStyle/>
+          <a:p>
+            <a:pPr algn="r">
+              <a:lnSpc>
+                <a:spcPts val="2200"/>
+              </a:lnSpc>
+              <a:defRPr sz="1000" b="0">
+                <a:solidFill>
+                  <a:srgbClr val="666666"/>
+                </a:solidFill>
+                <a:latin typeface="Calibri"/>
+              </a:defRPr>
+            </a:pPr>
+            <a:r>
+              <a:t>learn_placement — 03 quadratic place</a:t>
+            </a:r>
+          </a:p>
+        </p:txBody>
+      </p:sp>
+    </p:spTree>
+  </p:cSld>
+  <p:clrMapOvr>
+    <a:masterClrMapping/>
+  </p:clrMapOvr>
+</p:sld>
+</file>
+
+<file path=ppt/slides/slide14.xml><?xml version="1.0" encoding="utf-8"?>
+<p:sld xmlns:a="http://schemas.openxmlformats.org/drawingml/2006/main" xmlns:p="http://schemas.openxmlformats.org/presentationml/2006/main" xmlns:r="http://schemas.openxmlformats.org/officeDocument/2006/relationships">
+  <p:cSld>
+    <p:spTree>
+      <p:nvGrpSpPr>
+        <p:cNvPr id="1" name=""/>
+        <p:cNvGrpSpPr/>
+        <p:nvPr/>
+      </p:nvGrpSpPr>
+      <p:grpSpPr/>
+      <p:sp>
+        <p:nvSpPr>
+          <p:cNvPr id="2" name="TextBox 1"/>
+          <p:cNvSpPr txBox="1"/>
+          <p:nvPr/>
+        </p:nvSpPr>
+        <p:spPr>
+          <a:xfrm>
+            <a:off x="548640" y="411480"/>
+            <a:ext cx="11064240" cy="777240"/>
+          </a:xfrm>
+          <a:prstGeom prst="rect">
+            <a:avLst/>
+          </a:prstGeom>
+          <a:noFill/>
+        </p:spPr>
+        <p:txBody>
+          <a:bodyPr wrap="square">
+            <a:noAutofit/>
+          </a:bodyPr>
+          <a:lstStyle/>
+          <a:p>
+            <a:pPr>
+              <a:lnSpc>
+                <a:spcPts val="2200"/>
+              </a:lnSpc>
+            </a:pPr>
+            <a:r>
+              <a:rPr sz="2800" b="1">
+                <a:solidFill>
+                  <a:srgbClr val="1A1A2E"/>
+                </a:solidFill>
+                <a:latin typeface="Calibri"/>
+              </a:rPr>
               <a:t>Your turn</a:t>
             </a:r>
           </a:p>
@@ -4800,28 +5484,6 @@
               <a:t>Teaching point: pad constraints raise HPWL versus unconstrained force on the same seed</a:t>
             </a:r>
           </a:p>
-          <a:p>
-            <a:pPr lvl="0" marL="457200" indent="-228600">
-              <a:buFont typeface="Calibri"/>
-              <a:spcAft>
-                <a:spcPts val="1000"/>
-              </a:spcAft>
-              <a:buSzPct val="100000"/>
-              <a:buChar char="•"/>
-              <a:lnSpc>
-                <a:spcPts val="2200"/>
-              </a:lnSpc>
-            </a:pPr>
-            <a:r>
-              <a:rPr sz="2000" b="0">
-                <a:solidFill>
-                  <a:srgbClr val="333333"/>
-                </a:solidFill>
-                <a:latin typeface="Calibri"/>
-              </a:rPr>
-              <a:t>&lt;!-- algorithm-walkthrough --&gt;</a:t>
-            </a:r>
-          </a:p>
         </p:txBody>
       </p:sp>
       <p:sp>
@@ -4915,45 +5577,21 @@
                 </a:solidFill>
                 <a:latin typeface="Calibri"/>
               </a:rPr>
-              <a:t>Pads A and D stay fixed</a:t>
-            </a:r>
-          </a:p>
-        </p:txBody>
-      </p:sp>
-      <p:pic>
-        <p:nvPicPr>
-          <p:cNvPr id="3" name="Picture 2" descr="01-pads-fixed.png"/>
-          <p:cNvPicPr>
-            <a:picLocks noChangeAspect="1"/>
-          </p:cNvPicPr>
-          <p:nvPr/>
-        </p:nvPicPr>
-        <p:blipFill>
-          <a:blip r:embed="rId2"/>
-          <a:stretch>
-            <a:fillRect/>
-          </a:stretch>
-        </p:blipFill>
-        <p:spPr>
-          <a:xfrm>
-            <a:off x="548640" y="1143000"/>
-            <a:ext cx="9404113" cy="4572000"/>
-          </a:xfrm>
-          <a:prstGeom prst="rect">
-            <a:avLst/>
-          </a:prstGeom>
-        </p:spPr>
-      </p:pic>
-      <p:sp>
-        <p:nvSpPr>
-          <p:cNvPr id="4" name="TextBox 3"/>
+              <a:t>Pseudocode</a:t>
+            </a:r>
+          </a:p>
+        </p:txBody>
+      </p:sp>
+      <p:sp>
+        <p:nvSpPr>
+          <p:cNvPr id="3" name="TextBox 2"/>
           <p:cNvSpPr txBox="1"/>
           <p:nvPr/>
         </p:nvSpPr>
         <p:spPr>
           <a:xfrm>
-            <a:off x="548640" y="5897880"/>
-            <a:ext cx="11064240" cy="411480"/>
+            <a:off x="548640" y="1234440"/>
+            <a:ext cx="11064240" cy="4937760"/>
           </a:xfrm>
           <a:prstGeom prst="rect">
             <a:avLst/>
@@ -4966,26 +5604,98 @@
           </a:bodyPr>
           <a:lstStyle/>
           <a:p>
-            <a:pPr>
+            <a:pPr lvl="0" marL="457200" indent="-228600">
+              <a:buFont typeface="Calibri"/>
+              <a:spcAft>
+                <a:spcPts val="1000"/>
+              </a:spcAft>
+              <a:buSzPct val="100000"/>
+              <a:buChar char="•"/>
               <a:lnSpc>
                 <a:spcPts val="2200"/>
               </a:lnSpc>
             </a:pPr>
             <a:r>
-              <a:rPr sz="1200" b="0">
+              <a:rPr sz="2000" b="0">
                 <a:solidFill>
                   <a:srgbClr val="333333"/>
                 </a:solidFill>
                 <a:latin typeface="Calibri"/>
               </a:rPr>
-              <a:t>Pads A and D stay fixed</a:t>
-            </a:r>
-          </a:p>
-        </p:txBody>
-      </p:sp>
-      <p:sp>
-        <p:nvSpPr>
-          <p:cNvPr id="5" name="TextBox 4"/>
+              <a:t>Quadratic-lite solves free cells toward neighbor averages under pinned pads</a:t>
+            </a:r>
+          </a:p>
+          <a:p>
+            <a:pPr lvl="0" marL="457200" indent="-228600">
+              <a:buFont typeface="Calibri"/>
+              <a:spcAft>
+                <a:spcPts val="1000"/>
+              </a:spcAft>
+              <a:buSzPct val="100000"/>
+              <a:buChar char="•"/>
+              <a:lnSpc>
+                <a:spcPts val="2200"/>
+              </a:lnSpc>
+            </a:pPr>
+            <a:r>
+              <a:rPr sz="2000" b="0">
+                <a:solidFill>
+                  <a:srgbClr val="333333"/>
+                </a:solidFill>
+                <a:latin typeface="Calibri"/>
+              </a:rPr>
+              <a:t>Damping keeps the system from collapsing</a:t>
+            </a:r>
+          </a:p>
+          <a:p>
+            <a:pPr lvl="0" marL="457200" indent="-228600">
+              <a:buFont typeface="Calibri"/>
+              <a:spcAft>
+                <a:spcPts val="1000"/>
+              </a:spcAft>
+              <a:buSzPct val="100000"/>
+              <a:buChar char="•"/>
+              <a:lnSpc>
+                <a:spcPts val="2200"/>
+              </a:lnSpc>
+            </a:pPr>
+            <a:r>
+              <a:rPr sz="2000" b="0">
+                <a:solidFill>
+                  <a:srgbClr val="333333"/>
+                </a:solidFill>
+                <a:latin typeface="Calibri"/>
+              </a:rPr>
+              <a:t>Open this module's examples file and find the Pseudocode section</a:t>
+            </a:r>
+          </a:p>
+          <a:p>
+            <a:pPr lvl="0" marL="457200" indent="-228600">
+              <a:buFont typeface="Calibri"/>
+              <a:spcAft>
+                <a:spcPts val="1000"/>
+              </a:spcAft>
+              <a:buSzPct val="100000"/>
+              <a:buChar char="•"/>
+              <a:lnSpc>
+                <a:spcPts val="2200"/>
+              </a:lnSpc>
+            </a:pPr>
+            <a:r>
+              <a:rPr sz="2000" b="0">
+                <a:solidFill>
+                  <a:srgbClr val="333333"/>
+                </a:solidFill>
+                <a:latin typeface="Calibri"/>
+              </a:rPr>
+              <a:t>That written sketch is what you implement on the implement track and what the browser</a:t>
+            </a:r>
+          </a:p>
+        </p:txBody>
+      </p:sp>
+      <p:sp>
+        <p:nvSpPr>
+          <p:cNvPr id="4" name="TextBox 3"/>
           <p:cNvSpPr txBox="1"/>
           <p:nvPr/>
         </p:nvSpPr>
@@ -5074,45 +5784,21 @@
                 </a:solidFill>
                 <a:latin typeface="Calibri"/>
               </a:rPr>
-              <a:t>Free cells slide toward neighbors</a:t>
-            </a:r>
-          </a:p>
-        </p:txBody>
-      </p:sp>
-      <p:pic>
-        <p:nvPicPr>
-          <p:cNvPr id="3" name="Picture 2" descr="02-free-cells.png"/>
-          <p:cNvPicPr>
-            <a:picLocks noChangeAspect="1"/>
-          </p:cNvPicPr>
-          <p:nvPr/>
-        </p:nvPicPr>
-        <p:blipFill>
-          <a:blip r:embed="rId2"/>
-          <a:stretch>
-            <a:fillRect/>
-          </a:stretch>
-        </p:blipFill>
-        <p:spPr>
-          <a:xfrm>
-            <a:off x="548640" y="1143000"/>
-            <a:ext cx="9404113" cy="4572000"/>
-          </a:xfrm>
-          <a:prstGeom prst="rect">
-            <a:avLst/>
-          </a:prstGeom>
-        </p:spPr>
-      </p:pic>
-      <p:sp>
-        <p:nvSpPr>
-          <p:cNvPr id="4" name="TextBox 3"/>
+              <a:t>Algorithm sketch</a:t>
+            </a:r>
+          </a:p>
+        </p:txBody>
+      </p:sp>
+      <p:sp>
+        <p:nvSpPr>
+          <p:cNvPr id="3" name="TextBox 2"/>
           <p:cNvSpPr txBox="1"/>
           <p:nvPr/>
         </p:nvSpPr>
         <p:spPr>
           <a:xfrm>
-            <a:off x="548640" y="5897880"/>
-            <a:ext cx="11064240" cy="411480"/>
+            <a:off x="548640" y="1234440"/>
+            <a:ext cx="11064240" cy="4937760"/>
           </a:xfrm>
           <a:prstGeom prst="rect">
             <a:avLst/>
@@ -5125,26 +5811,32 @@
           </a:bodyPr>
           <a:lstStyle/>
           <a:p>
-            <a:pPr>
+            <a:pPr lvl="0" marL="457200" indent="-228600">
+              <a:buFont typeface="Calibri"/>
+              <a:spcAft>
+                <a:spcPts val="1000"/>
+              </a:spcAft>
+              <a:buSzPct val="100000"/>
+              <a:buChar char="•"/>
               <a:lnSpc>
                 <a:spcPts val="2200"/>
               </a:lnSpc>
             </a:pPr>
             <a:r>
-              <a:rPr sz="1200" b="0">
+              <a:rPr sz="2000" b="0">
                 <a:solidFill>
                   <a:srgbClr val="333333"/>
                 </a:solidFill>
                 <a:latin typeface="Calibri"/>
               </a:rPr>
-              <a:t>Free cells slide toward neighbors</a:t>
-            </a:r>
-          </a:p>
-        </p:txBody>
-      </p:sp>
-      <p:sp>
-        <p:nvSpPr>
-          <p:cNvPr id="5" name="TextBox 4"/>
+              <a:t>With A and D fixed</a:t>
+            </a:r>
+          </a:p>
+        </p:txBody>
+      </p:sp>
+      <p:sp>
+        <p:nvSpPr>
+          <p:cNvPr id="4" name="TextBox 3"/>
           <p:cNvSpPr txBox="1"/>
           <p:nvPr/>
         </p:nvSpPr>
@@ -5233,50 +5925,28 @@
                 </a:solidFill>
                 <a:latin typeface="Calibri"/>
               </a:rPr>
-              <a:t>After quadratic: HPWL forty-eight</a:t>
-            </a:r>
-          </a:p>
-        </p:txBody>
-      </p:sp>
-      <p:pic>
-        <p:nvPicPr>
-          <p:cNvPr id="3" name="Picture 2" descr="03-after-quad.png"/>
-          <p:cNvPicPr>
-            <a:picLocks noChangeAspect="1"/>
-          </p:cNvPicPr>
+              <a:t>Algorithm sketch — try these</a:t>
+            </a:r>
+          </a:p>
+        </p:txBody>
+      </p:sp>
+      <p:sp>
+        <p:nvSpPr>
+          <p:cNvPr id="3" name="TextBox 2"/>
+          <p:cNvSpPr txBox="1"/>
           <p:nvPr/>
-        </p:nvPicPr>
-        <p:blipFill>
-          <a:blip r:embed="rId2"/>
-          <a:stretch>
-            <a:fillRect/>
-          </a:stretch>
-        </p:blipFill>
+        </p:nvSpPr>
         <p:spPr>
           <a:xfrm>
             <a:off x="548640" y="1143000"/>
-            <a:ext cx="9404113" cy="4572000"/>
+            <a:ext cx="11064240" cy="5029200"/>
           </a:xfrm>
           <a:prstGeom prst="rect">
             <a:avLst/>
           </a:prstGeom>
-        </p:spPr>
-      </p:pic>
-      <p:sp>
-        <p:nvSpPr>
-          <p:cNvPr id="4" name="TextBox 3"/>
-          <p:cNvSpPr txBox="1"/>
-          <p:nvPr/>
-        </p:nvSpPr>
-        <p:spPr>
-          <a:xfrm>
-            <a:off x="548640" y="5897880"/>
-            <a:ext cx="11064240" cy="411480"/>
-          </a:xfrm>
-          <a:prstGeom prst="rect">
-            <a:avLst/>
-          </a:prstGeom>
-          <a:noFill/>
+          <a:solidFill>
+            <a:srgbClr val="F4F4F4"/>
+          </a:solidFill>
         </p:spPr>
         <p:txBody>
           <a:bodyPr wrap="square">
@@ -5288,22 +5958,120 @@
               <a:lnSpc>
                 <a:spcPts val="2200"/>
               </a:lnSpc>
+              <a:spcAft>
+                <a:spcPts val="400"/>
+              </a:spcAft>
             </a:pPr>
             <a:r>
-              <a:rPr sz="1200" b="0">
+              <a:rPr sz="2000" b="0">
                 <a:solidFill>
                   <a:srgbClr val="333333"/>
                 </a:solidFill>
-                <a:latin typeface="Calibri"/>
+                <a:latin typeface="Consolas"/>
               </a:rPr>
-              <a:t>After quadratic: HPWL forty-eight</a:t>
-            </a:r>
-          </a:p>
-        </p:txBody>
-      </p:sp>
-      <p:sp>
-        <p:nvSpPr>
-          <p:cNvPr id="5" name="TextBox 4"/>
+              <a:t>INPUT: positions, nets, fixed pads {A,D}</a:t>
+            </a:r>
+          </a:p>
+          <a:p>
+            <a:pPr>
+              <a:lnSpc>
+                <a:spcPts val="2200"/>
+              </a:lnSpc>
+              <a:spcAft>
+                <a:spcPts val="400"/>
+              </a:spcAft>
+            </a:pPr>
+            <a:r>
+              <a:rPr sz="2000" b="0">
+                <a:solidFill>
+                  <a:srgbClr val="333333"/>
+                </a:solidFill>
+                <a:latin typeface="Consolas"/>
+              </a:rPr>
+              <a:t>OUTPUT: free-cell coords + HPWL</a:t>
+            </a:r>
+          </a:p>
+          <a:p>
+            <a:pPr>
+              <a:lnSpc>
+                <a:spcPts val="2200"/>
+              </a:lnSpc>
+              <a:spcAft>
+                <a:spcPts val="400"/>
+              </a:spcAft>
+            </a:pPr>
+            <a:r>
+              <a:rPr sz="2000" b="0">
+                <a:solidFill>
+                  <a:srgbClr val="333333"/>
+                </a:solidFill>
+                <a:latin typeface="Consolas"/>
+              </a:rPr>
+              <a:t>repeat: for free c:</a:t>
+            </a:r>
+          </a:p>
+          <a:p>
+            <a:pPr>
+              <a:lnSpc>
+                <a:spcPts val="2200"/>
+              </a:lnSpc>
+              <a:spcAft>
+                <a:spcPts val="400"/>
+              </a:spcAft>
+            </a:pPr>
+            <a:r>
+              <a:rPr sz="2000" b="0">
+                <a:solidFill>
+                  <a:srgbClr val="333333"/>
+                </a:solidFill>
+                <a:latin typeface="Consolas"/>
+              </a:rPr>
+              <a:t>  blend toward neighbor average (damped)</a:t>
+            </a:r>
+          </a:p>
+          <a:p>
+            <a:pPr>
+              <a:lnSpc>
+                <a:spcPts val="2200"/>
+              </a:lnSpc>
+              <a:spcAft>
+                <a:spcPts val="400"/>
+              </a:spcAft>
+            </a:pPr>
+            <a:r>
+              <a:rPr sz="2000" b="0">
+                <a:solidFill>
+                  <a:srgbClr val="333333"/>
+                </a:solidFill>
+                <a:latin typeface="Consolas"/>
+              </a:rPr>
+              <a:t>pads A,D remain pinned</a:t>
+            </a:r>
+          </a:p>
+          <a:p>
+            <a:pPr>
+              <a:lnSpc>
+                <a:spcPts val="2200"/>
+              </a:lnSpc>
+              <a:spcAft>
+                <a:spcPts val="400"/>
+              </a:spcAft>
+            </a:pPr>
+            <a:r>
+              <a:rPr sz="2000" b="0">
+                <a:solidFill>
+                  <a:srgbClr val="333333"/>
+                </a:solidFill>
+                <a:latin typeface="Consolas"/>
+              </a:rPr>
+              <a:t>GOLDEN starter 52 → HPWL 48</a:t>
+            </a:r>
+          </a:p>
+        </p:txBody>
+      </p:sp>
+      <p:sp>
+        <p:nvSpPr>
+          <p:cNvPr id="4" name="TextBox 3"/>
           <p:cNvSpPr txBox="1"/>
           <p:nvPr/>
         </p:nvSpPr>
@@ -5392,14 +6160,14 @@
                 </a:solidFill>
                 <a:latin typeface="Calibri"/>
               </a:rPr>
-              <a:t>Quadratic vs unconstrained force</a:t>
+              <a:t>Pads A and D stay fixed</a:t>
             </a:r>
           </a:p>
         </p:txBody>
       </p:sp>
       <p:pic>
         <p:nvPicPr>
-          <p:cNvPr id="3" name="Picture 2" descr="04-vs-force.png"/>
+          <p:cNvPr id="3" name="Picture 2" descr="01-pads-fixed.png"/>
           <p:cNvPicPr>
             <a:picLocks noChangeAspect="1"/>
           </p:cNvPicPr>
@@ -5455,7 +6223,7 @@
                 </a:solidFill>
                 <a:latin typeface="Calibri"/>
               </a:rPr>
-              <a:t>Quadratic vs unconstrained force</a:t>
+              <a:t>Pads A and D stay fixed</a:t>
             </a:r>
           </a:p>
         </p:txBody>
@@ -5551,14 +6319,14 @@
                 </a:solidFill>
                 <a:latin typeface="Calibri"/>
               </a:rPr>
-              <a:t>Pads anchor the solve</a:t>
+              <a:t>Free cells slide toward neighbors</a:t>
             </a:r>
           </a:p>
         </p:txBody>
       </p:sp>
       <p:pic>
         <p:nvPicPr>
-          <p:cNvPr id="3" name="Picture 2" descr="05-takeaway.png"/>
+          <p:cNvPr id="3" name="Picture 2" descr="02-free-cells.png"/>
           <p:cNvPicPr>
             <a:picLocks noChangeAspect="1"/>
           </p:cNvPicPr>
@@ -5614,7 +6382,7 @@
                 </a:solidFill>
                 <a:latin typeface="Calibri"/>
               </a:rPr>
-              <a:t>Pads anchor the solve</a:t>
+              <a:t>Free cells slide toward neighbors</a:t>
             </a:r>
           </a:p>
         </p:txBody>
@@ -5710,21 +6478,45 @@
                 </a:solidFill>
                 <a:latin typeface="Calibri"/>
               </a:rPr>
-              <a:t>Browser lab track</a:t>
-            </a:r>
-          </a:p>
-        </p:txBody>
-      </p:sp>
-      <p:sp>
-        <p:nvSpPr>
-          <p:cNvPr id="3" name="TextBox 2"/>
+              <a:t>After quadratic: HPWL forty-eight</a:t>
+            </a:r>
+          </a:p>
+        </p:txBody>
+      </p:sp>
+      <p:pic>
+        <p:nvPicPr>
+          <p:cNvPr id="3" name="Picture 2" descr="03-after-quad.png"/>
+          <p:cNvPicPr>
+            <a:picLocks noChangeAspect="1"/>
+          </p:cNvPicPr>
+          <p:nvPr/>
+        </p:nvPicPr>
+        <p:blipFill>
+          <a:blip r:embed="rId2"/>
+          <a:stretch>
+            <a:fillRect/>
+          </a:stretch>
+        </p:blipFill>
+        <p:spPr>
+          <a:xfrm>
+            <a:off x="548640" y="1143000"/>
+            <a:ext cx="9404113" cy="4572000"/>
+          </a:xfrm>
+          <a:prstGeom prst="rect">
+            <a:avLst/>
+          </a:prstGeom>
+        </p:spPr>
+      </p:pic>
+      <p:sp>
+        <p:nvSpPr>
+          <p:cNvPr id="4" name="TextBox 3"/>
           <p:cNvSpPr txBox="1"/>
           <p:nvPr/>
         </p:nvSpPr>
         <p:spPr>
           <a:xfrm>
-            <a:off x="548640" y="1234440"/>
-            <a:ext cx="11064240" cy="4937760"/>
+            <a:off x="548640" y="5897880"/>
+            <a:ext cx="11064240" cy="411480"/>
           </a:xfrm>
           <a:prstGeom prst="rect">
             <a:avLst/>
@@ -5737,94 +6529,26 @@
           </a:bodyPr>
           <a:lstStyle/>
           <a:p>
-            <a:pPr lvl="0" marL="457200" indent="-228600">
-              <a:buFont typeface="Calibri"/>
-              <a:spcAft>
-                <a:spcPts val="1000"/>
-              </a:spcAft>
-              <a:buSzPct val="100000"/>
-              <a:buChar char="•"/>
+            <a:pPr>
               <a:lnSpc>
                 <a:spcPts val="2200"/>
               </a:lnSpc>
             </a:pPr>
             <a:r>
-              <a:rPr sz="2000" b="0">
+              <a:rPr sz="1200" b="0">
                 <a:solidFill>
                   <a:srgbClr val="333333"/>
                 </a:solidFill>
                 <a:latin typeface="Calibri"/>
               </a:rPr>
-              <a:t>In the browser lab track, open the </a:t>
-            </a:r>
-            <a:r>
-              <a:rPr sz="2000" b="1">
-                <a:solidFill>
-                  <a:srgbClr val="333333"/>
-                </a:solidFill>
-                <a:latin typeface="Calibri"/>
-              </a:rPr>
-              <a:t>quadratic-place</a:t>
-            </a:r>
-            <a:r>
-              <a:rPr sz="2000" b="0">
-                <a:solidFill>
-                  <a:srgbClr val="333333"/>
-                </a:solidFill>
-                <a:latin typeface="Calibri"/>
-              </a:rPr>
-              <a:t> lab from the tools shelf</a:t>
-            </a:r>
-          </a:p>
-          <a:p>
-            <a:pPr lvl="0" marL="457200" indent="-228600">
-              <a:buFont typeface="Calibri"/>
-              <a:spcAft>
-                <a:spcPts val="1000"/>
-              </a:spcAft>
-              <a:buSzPct val="100000"/>
-              <a:buChar char="•"/>
-              <a:lnSpc>
-                <a:spcPts val="2200"/>
-              </a:lnSpc>
-            </a:pPr>
-            <a:r>
-              <a:rPr sz="2000" b="0">
-                <a:solidFill>
-                  <a:srgbClr val="333333"/>
-                </a:solidFill>
-                <a:latin typeface="Calibri"/>
-              </a:rPr>
-              <a:t>Load the starter placement, run the algorithm once</a:t>
-            </a:r>
-          </a:p>
-          <a:p>
-            <a:pPr lvl="0" marL="457200" indent="-228600">
-              <a:buFont typeface="Calibri"/>
-              <a:spcAft>
-                <a:spcPts val="1000"/>
-              </a:spcAft>
-              <a:buSzPct val="100000"/>
-              <a:buChar char="•"/>
-              <a:lnSpc>
-                <a:spcPts val="2200"/>
-              </a:lnSpc>
-            </a:pPr>
-            <a:r>
-              <a:rPr sz="2000" b="0">
-                <a:solidFill>
-                  <a:srgbClr val="333333"/>
-                </a:solidFill>
-                <a:latin typeface="Calibri"/>
-              </a:rPr>
-              <a:t>Work the challenges that lock the goldens</a:t>
-            </a:r>
-          </a:p>
-        </p:txBody>
-      </p:sp>
-      <p:sp>
-        <p:nvSpPr>
-          <p:cNvPr id="4" name="TextBox 3"/>
+              <a:t>After quadratic: HPWL forty-eight</a:t>
+            </a:r>
+          </a:p>
+        </p:txBody>
+      </p:sp>
+      <p:sp>
+        <p:nvSpPr>
+          <p:cNvPr id="5" name="TextBox 4"/>
           <p:cNvSpPr txBox="1"/>
           <p:nvPr/>
         </p:nvSpPr>
@@ -5913,21 +6637,45 @@
                 </a:solidFill>
                 <a:latin typeface="Calibri"/>
               </a:rPr>
-              <a:t>Implement track</a:t>
-            </a:r>
-          </a:p>
-        </p:txBody>
-      </p:sp>
-      <p:sp>
-        <p:nvSpPr>
-          <p:cNvPr id="3" name="TextBox 2"/>
+              <a:t>Quadratic vs unconstrained force</a:t>
+            </a:r>
+          </a:p>
+        </p:txBody>
+      </p:sp>
+      <p:pic>
+        <p:nvPicPr>
+          <p:cNvPr id="3" name="Picture 2" descr="04-vs-force.png"/>
+          <p:cNvPicPr>
+            <a:picLocks noChangeAspect="1"/>
+          </p:cNvPicPr>
+          <p:nvPr/>
+        </p:nvPicPr>
+        <p:blipFill>
+          <a:blip r:embed="rId2"/>
+          <a:stretch>
+            <a:fillRect/>
+          </a:stretch>
+        </p:blipFill>
+        <p:spPr>
+          <a:xfrm>
+            <a:off x="548640" y="1143000"/>
+            <a:ext cx="9404113" cy="4572000"/>
+          </a:xfrm>
+          <a:prstGeom prst="rect">
+            <a:avLst/>
+          </a:prstGeom>
+        </p:spPr>
+      </p:pic>
+      <p:sp>
+        <p:nvSpPr>
+          <p:cNvPr id="4" name="TextBox 3"/>
           <p:cNvSpPr txBox="1"/>
           <p:nvPr/>
         </p:nvSpPr>
         <p:spPr>
           <a:xfrm>
-            <a:off x="548640" y="1234440"/>
-            <a:ext cx="11064240" cy="4937760"/>
+            <a:off x="548640" y="5897880"/>
+            <a:ext cx="11064240" cy="411480"/>
           </a:xfrm>
           <a:prstGeom prst="rect">
             <a:avLst/>
@@ -5940,76 +6688,26 @@
           </a:bodyPr>
           <a:lstStyle/>
           <a:p>
-            <a:pPr lvl="0" marL="457200" indent="-228600">
-              <a:buFont typeface="Calibri"/>
-              <a:spcAft>
-                <a:spcPts val="1000"/>
-              </a:spcAft>
-              <a:buSzPct val="100000"/>
-              <a:buChar char="•"/>
+            <a:pPr>
               <a:lnSpc>
                 <a:spcPts val="2200"/>
               </a:lnSpc>
             </a:pPr>
             <a:r>
-              <a:rPr sz="2000" b="0">
+              <a:rPr sz="1200" b="0">
                 <a:solidFill>
                   <a:srgbClr val="333333"/>
                 </a:solidFill>
                 <a:latin typeface="Calibri"/>
               </a:rPr>
-              <a:t>In the implement track, open this module’s examples and the course `common/` solvers</a:t>
-            </a:r>
-          </a:p>
-          <a:p>
-            <a:pPr lvl="0" marL="457200" indent="-228600">
-              <a:buFont typeface="Calibri"/>
-              <a:spcAft>
-                <a:spcPts val="1000"/>
-              </a:spcAft>
-              <a:buSzPct val="100000"/>
-              <a:buChar char="•"/>
-              <a:lnSpc>
-                <a:spcPts val="2200"/>
-              </a:lnSpc>
-            </a:pPr>
-            <a:r>
-              <a:rPr sz="2000" b="0">
-                <a:solidFill>
-                  <a:srgbClr val="333333"/>
-                </a:solidFill>
-                <a:latin typeface="Calibri"/>
-              </a:rPr>
-              <a:t>Parse `tiny_place.json`, run the algorithm with a deterministic seed</a:t>
-            </a:r>
-          </a:p>
-          <a:p>
-            <a:pPr lvl="0" marL="457200" indent="-228600">
-              <a:buFont typeface="Calibri"/>
-              <a:spcAft>
-                <a:spcPts val="1000"/>
-              </a:spcAft>
-              <a:buSzPct val="100000"/>
-              <a:buChar char="•"/>
-              <a:lnSpc>
-                <a:spcPts val="2200"/>
-              </a:lnSpc>
-            </a:pPr>
-            <a:r>
-              <a:rPr sz="2000" b="0">
-                <a:solidFill>
-                  <a:srgbClr val="333333"/>
-                </a:solidFill>
-                <a:latin typeface="Calibri"/>
-              </a:rPr>
-              <a:t>Match the browser goldens before you claim the checklist</a:t>
-            </a:r>
-          </a:p>
-        </p:txBody>
-      </p:sp>
-      <p:sp>
-        <p:nvSpPr>
-          <p:cNvPr id="4" name="TextBox 3"/>
+              <a:t>Quadratic vs unconstrained force</a:t>
+            </a:r>
+          </a:p>
+        </p:txBody>
+      </p:sp>
+      <p:sp>
+        <p:nvSpPr>
+          <p:cNvPr id="5" name="TextBox 4"/>
           <p:cNvSpPr txBox="1"/>
           <p:nvPr/>
         </p:nvSpPr>
